--- a/sales-templates/en/eduasiste-pitch-deck.pptx
+++ b/sales-templates/en/eduasiste-pitch-deck.pptx
@@ -587,7 +587,7 @@
             </a:pPr>
             <a:r>
               <a:rPr/>
-              <a:t>Nod along with the pain. Don't rush. If {{Pain Point}} came up on the discovery call, name it here out loud — "you told me {{Pain Point}}, and that's exactly slide two."</a:t>
+              <a:t>Nod along with the pain. Don't rush. If {{Pain Point}} came up on the discovery call, name it here out loud: "you told me {{Pain Point}}, and that's exactly slide two."</a:t>
             </a:r>
           </a:p>
         </p:txBody>
@@ -669,7 +669,7 @@
             </a:pPr>
             <a:r>
               <a:rPr/>
-              <a:t>This is the aha. Pause here. It's a different mental model than ed-tech — not another dashboard, a twin that reports to you. Draw the two circles in the air if you have to. Let it land before moving on.</a:t>
+              <a:t>This is the aha. Pause here. It's a different mental model than ed-tech. Not another dashboard, a twin that reports to you. Draw the two circles in the air if you have to. Let it land before moving on.</a:t>
             </a:r>
           </a:p>
         </p:txBody>
@@ -833,7 +833,7 @@
             </a:pPr>
             <a:r>
               <a:rPr/>
-              <a:t>This is where it stops looking like a worksheet app and starts looking like a tutor. The auto-summary is the under-promised, over-delivered feature — let them realize it on their own.</a:t>
+              <a:t>This is where it stops looking like a worksheet app and starts looking like a tutor. The auto-summary is the under-promised, over-delivered feature. Let them realize it on their own.</a:t>
             </a:r>
           </a:p>
         </p:txBody>
@@ -997,7 +997,7 @@
             </a:pPr>
             <a:r>
               <a:rPr/>
-              <a:t>Shows momentum and creates FOMO for early adopters. Tie one item to {{Prospect Name}}'s situation — if they run a co-op, lead with classroom view.</a:t>
+              <a:t>Shows momentum and creates FOMO for early adopters. Tie one item to {{Prospect Name}}'s situation. If they run a co-op, lead with classroom view.</a:t>
             </a:r>
           </a:p>
         </p:txBody>
@@ -4727,7 +4727,7 @@
             </a:pPr>
             <a:r>
               <a:rPr/>
-              <a:t>EduAsiste — Pitch Deck</a:t>
+              <a:t>EduAsiste: Pitch Deck</a:t>
             </a:r>
           </a:p>
         </p:txBody>
@@ -4825,7 +4825,7 @@
             <a:pPr lvl="0"/>
             <a:r>
               <a:rPr/>
-              <a:t>Free trial on the {{Tier}} plan — no credit card</a:t>
+              <a:t>Free trial on the {{Tier}} plan, no credit card</a:t>
             </a:r>
           </a:p>
           <a:p>
@@ -4893,11 +4893,11 @@
             </a:pPr>
             <a:r>
               <a:rPr sz="2000" b="1"/>
-              <a:t>HOW TO USE THIS TEMPLATE</a:t>
+              <a:t>HOW TO USE THIS TEMPLATE.</a:t>
             </a:r>
             <a:r>
               <a:rPr sz="2000"/>
-              <a:t> — 1. </a:t>
+              <a:t> 1. </a:t>
             </a:r>
             <a:r>
               <a:rPr sz="2000" i="1"/>
@@ -5149,7 +5149,7 @@
             </a:pPr>
             <a:r>
               <a:rPr/>
-              <a:t>What if your child had their own AI tutor — and you had one too?</a:t>
+              <a:t>What if your child had their own AI tutor, and you had one too?</a:t>
             </a:r>
           </a:p>
         </p:txBody>
@@ -5256,14 +5256,14 @@
             <a:pPr lvl="0"/>
             <a:r>
               <a:rPr/>
-              <a:t>See what your child learned today — ask your twin "How's Emma doing in reading?" Live answer.</a:t>
+              <a:t>See what your child learned today. Ask your twin "How's Emma doing in reading?" and get a live answer.</a:t>
             </a:r>
           </a:p>
           <a:p>
             <a:pPr lvl="0"/>
             <a:r>
               <a:rPr/>
-              <a:t>Assign homework in 30 seconds — type the topic, the system builds the worksheet plus a private answer key for you.</a:t>
+              <a:t>Assign homework in 30 seconds: type the topic, the system builds the worksheet plus a private answer key for you.</a:t>
             </a:r>
           </a:p>
         </p:txBody>
@@ -5333,14 +5333,14 @@
             <a:pPr lvl="0"/>
             <a:r>
               <a:rPr/>
-              <a:t>Socratic study sessions — your child's twin asks questions, doesn't hand out answers; you get a summary of what clicked.</a:t>
+              <a:t>Socratic study sessions: your child's twin asks questions instead of handing out answers, and you get a summary of what clicked.</a:t>
             </a:r>
           </a:p>
           <a:p>
             <a:pPr lvl="0"/>
             <a:r>
               <a:rPr/>
-              <a:t>Goals that actually move — set it once, progress updates itself as your child works.</a:t>
+              <a:t>Goals that actually move. Set it once, and progress updates itself as your child works.</a:t>
             </a:r>
           </a:p>
         </p:txBody>
@@ -5424,7 +5424,7 @@
             <a:pPr lvl="0"/>
             <a:r>
               <a:rPr/>
-              <a:t>Your child's twin belongs to them — not to us, not to their school</a:t>
+              <a:t>Your child's twin belongs to them, not to us or to their school</a:t>
             </a:r>
           </a:p>
           <a:p>
@@ -5508,14 +5508,14 @@
             <a:pPr lvl="0"/>
             <a:r>
               <a:rPr/>
-              <a:t>Classroom view — teachers managing whole cohorts</a:t>
+              <a:t>Classroom view, for teachers managing whole cohorts</a:t>
             </a:r>
           </a:p>
           <a:p>
             <a:pPr lvl="0"/>
             <a:r>
               <a:rPr/>
-              <a:t>Co-parent collaboration — draft assignments together, send as a team</a:t>
+              <a:t>Co-parent collaboration: draft assignments together, send as a team</a:t>
             </a:r>
           </a:p>
         </p:txBody>

--- a/sales-templates/en/eduasiste-pitch-deck.pptx
+++ b/sales-templates/en/eduasiste-pitch-deck.pptx
@@ -7,6 +7,18 @@
   <p:notesMasterIdLst>
     <p:notesMasterId r:id="rId12"/>
   </p:notesMasterIdLst>
+  <p:sldIdLst>
+    <p:sldId id="256" r:id="rId2"/>
+    <p:sldId id="257" r:id="rId3"/>
+    <p:sldId id="258" r:id="rId4"/>
+    <p:sldId id="259" r:id="rId5"/>
+    <p:sldId id="260" r:id="rId6"/>
+    <p:sldId id="261" r:id="rId7"/>
+    <p:sldId id="262" r:id="rId8"/>
+    <p:sldId id="263" r:id="rId9"/>
+    <p:sldId id="264" r:id="rId10"/>
+    <p:sldId id="265" r:id="rId11"/>
+  </p:sldIdLst>
   <p:sldSz cx="12191695" cy="6858000" type="screen4x3"/>
   <p:notesSz cx="6858000" cy="9144000"/>
   <p:defaultTextStyle>
